--- a/reports/nba-win-prediction-final-report.pptx
+++ b/reports/nba-win-prediction-final-report.pptx
@@ -9078,7 +9078,8 @@
                 <a:ea typeface="Microsoft JhengHei"/>
                 <a:cs typeface="Microsoft JhengHei"/>
               </a:rPr>
-              <a:t>Streamlit Community Cloud 部署進行中</a:t>
+              <a:t>已部署至 Streamlit Community Cloud：
+nba-analyst-ktgfbnvixska5ghseefnm8.streamlit.app</a:t>
             </a:r>
           </a:p>
         </p:txBody>
